--- a/presentacion/Presentacion_Completa_Proyecto_ENOE.pptx
+++ b/presentacion/Presentacion_Completa_Proyecto_ENOE.pptx
@@ -154,7 +154,7 @@
   <p:extLst>
     <p:ext uri="{521415D9-36F7-43E2-AB2F-B90AF26B5E84}">
       <p14:sectionLst xmlns:p14="http://schemas.microsoft.com/office/powerpoint/2010/main">
-        <p14:section name="A · Apertura" id="{BA225555-B8BF-40F8-BF9F-6B3BE8A326EE}">
+        <p14:section name="A · Apertura" id="{FD179230-3A16-4D77-8592-6458B11745EA}">
           <p14:sldIdLst>
             <p14:sldId id="256"/>
             <p14:sldId id="257"/>
@@ -163,14 +163,14 @@
             <p14:sldId id="260"/>
           </p14:sldIdLst>
         </p14:section>
-        <p14:section name="B · Datos y diseño muestral" id="{32A623BE-A986-4E8E-8158-2729D37FE6B1}">
+        <p14:section name="B · Datos y diseño muestral" id="{5945FE6A-60F1-4EAE-B5AF-AED6DA407727}">
           <p14:sldIdLst>
             <p14:sldId id="261"/>
             <p14:sldId id="262"/>
             <p14:sldId id="263"/>
           </p14:sldIdLst>
         </p14:section>
-        <p14:section name="C · Limpieza de datos" id="{48343C4E-3BDE-4050-8D94-E6735205E4D7}">
+        <p14:section name="C · Limpieza de datos" id="{8994B2B0-B47D-4182-84E2-A16A451F386D}">
           <p14:sldIdLst>
             <p14:sldId id="264"/>
             <p14:sldId id="265"/>
@@ -182,7 +182,7 @@
             <p14:sldId id="271"/>
           </p14:sldIdLst>
         </p14:section>
-        <p14:section name="D · Ingeniería de datos" id="{0E2E319E-1853-4433-8F50-B662291D76DA}">
+        <p14:section name="D · Ingeniería de datos" id="{654306DC-7A39-405F-9898-4B93735CFEA7}">
           <p14:sldIdLst>
             <p14:sldId id="272"/>
             <p14:sldId id="273"/>
@@ -191,7 +191,7 @@
             <p14:sldId id="276"/>
           </p14:sldIdLst>
         </p14:section>
-        <p14:section name="E · Estadística explicada" id="{81BE180F-4816-40BF-AC58-4E53E2D52041}">
+        <p14:section name="E · Estadística explicada" id="{9384CD35-8C2F-40CB-99EC-2EF6FF3A4804}">
           <p14:sldIdLst>
             <p14:sldId id="277"/>
             <p14:sldId id="278"/>
@@ -201,14 +201,14 @@
             <p14:sldId id="282"/>
           </p14:sldIdLst>
         </p14:section>
-        <p14:section name="F1 · Escolaridad e ingreso" id="{34B691DB-D339-4C26-8082-FB57B66754EA}">
+        <p14:section name="F1 · Escolaridad e ingreso" id="{7D88B385-EFAE-4301-A916-813CB2B97C85}">
           <p14:sldIdLst>
             <p14:sldId id="283"/>
             <p14:sldId id="284"/>
             <p14:sldId id="285"/>
           </p14:sldIdLst>
         </p14:section>
-        <p14:section name="F2 · Brecha de género" id="{505C7A0C-E14D-4213-A2EA-0978373CDE72}">
+        <p14:section name="F2 · Brecha de género" id="{4349A61E-68FD-4B3D-8BF9-819DD6C066C9}">
           <p14:sldIdLst>
             <p14:sldId id="286"/>
             <p14:sldId id="287"/>
@@ -219,7 +219,7 @@
             <p14:sldId id="292"/>
           </p14:sldIdLst>
         </p14:section>
-        <p14:section name="F3 · Informalidad, tablero y diagnóstico" id="{ABFB0C4F-B3E7-459F-9A4E-F51422D48825}">
+        <p14:section name="F3 · Informalidad, tablero y diagnóstico" id="{310E7B17-2650-4308-A8CA-2117CFBD5D9C}">
           <p14:sldIdLst>
             <p14:sldId id="293"/>
             <p14:sldId id="294"/>
@@ -227,7 +227,7 @@
             <p14:sldId id="296"/>
           </p14:sldIdLst>
         </p14:section>
-        <p14:section name="G · Cierre" id="{318EE239-CA67-4116-BC4D-AB151C2349CB}">
+        <p14:section name="G · Cierre" id="{E36C0AE9-1F70-4294-BCB9-9B30844AA12F}">
           <p14:sldIdLst>
             <p14:sldId id="297"/>
             <p14:sldId id="298"/>
@@ -235,7 +235,7 @@
             <p14:sldId id="300"/>
           </p14:sldIdLst>
         </p14:section>
-        <p14:section name="H · Respaldo" id="{DA3D4E3E-E7AD-4FCF-A5F1-D2D498D3474D}">
+        <p14:section name="H · Respaldo" id="{DB1C60EC-10CE-4ABD-9E80-847AFF89B441}">
           <p14:sldIdLst>
             <p14:sldId id="301"/>
             <p14:sldId id="302"/>
@@ -1925,7 +1925,7 @@
           </a:p>
           <a:p>
             <a:r>
-              <a:t>Aquí está la ingeniería de datos y la justificación del modelo. Los microdatos entran a un pipeline en Python que extrae, limpia, transforma y valida, y carga a SQLite con esquema en estrella, con llaves primarias, foráneas y restricciones CHECK. Los datos de la ENOE son tabulares, así que para analizar el modelo relacional es el adecuado. Pero para servir la ficha de una entidad a un tablero conviene un modelo documental: un documento por entidad con los indicadores anidados, sin joins, con esquema flexible. SQLite es la fuente de verdad y MongoDB es una vista de lectura que se regenera. Aclaración honesta: verificamos que la agregación de Mongo reproduce la vista SQL, pero no cargamos a un servidor real porque no hay uno instalado; los documentos están listos para mongoimport.</a:t>
+              <a:t>Aquí está la ingeniería de datos y la justificación del modelo. Los microdatos entran a un pipeline en Python que extrae, limpia, transforma y valida, y carga a SQLite con esquema en estrella, con llaves primarias, foráneas y restricciones CHECK. Los datos de la ENOE son tabulares, así que para analizar el modelo relacional es el adecuado. Pero para servir la ficha de una entidad a un tablero conviene un modelo documental: un documento por entidad con los indicadores anidados, sin joins, con esquema flexible. SQLite es la fuente de verdad y MongoDB es una vista de lectura que se regenera. Aclaración honesta: verificamos que la agregación de Mongo reproduce la vista SQL, pero no cargamos a un servidor real porque no hay uno instalado; la carga completa se probó con mongomock, un simulador, y los documentos están listos para mongoimport.</a:t>
             </a:r>
           </a:p>
         </p:txBody>
@@ -2075,7 +2075,7 @@
           </a:p>
           <a:p>
             <a:r>
-              <a:t>Para mostrar por qué usamos dos modelos, la misma pregunta en los dos lenguajes: la tasa de informalidad ponderada por entidad. En SQL es una agregación con JOIN y GROUP BY; la ponderación se expresa directamente con la suma de fac_tri por informal. En MongoDB es un pipeline de agregación con group y project. Verificamos que el resultado de MongoDB, calculado con la misma lógica sobre los documentos exportados, reproduce la vista SQL con una diferencia máxima de cero punto cero cero cinco puntos porcentuales, el redondeo del SQL. Donde el modelo documental brilla es en servir la ficha completa de una entidad: una sola lectura por clave, sin JOIN. Aclaración honesta: no cargamos a un servidor MongoDB real porque no hay uno instalado; los documentos están listos para mongoimport.</a:t>
+              <a:t>Para mostrar por qué usamos dos modelos, la misma pregunta en los dos lenguajes: la tasa de informalidad ponderada por entidad. En SQL es una agregación con JOIN y GROUP BY; la ponderación se expresa directamente con la suma de fac_tri por informal. En MongoDB es un pipeline de agregación con group y project. Verificamos que el resultado de MongoDB, calculado con la misma lógica sobre los documentos exportados, reproduce la vista SQL con una diferencia máxima de cero punto cero cero cinco puntos porcentuales, el redondeo del SQL. Donde el modelo documental brilla es en servir la ficha completa de una entidad: una sola lectura por clave, sin JOIN. Aclaración honesta: no cargamos a un servidor MongoDB real porque no hay uno instalado; la carga completa se probó con mongomock, un simulador, y los documentos están listos para mongoimport.</a:t>
             </a:r>
           </a:p>
         </p:txBody>
@@ -4100,7 +4100,7 @@
           </a:p>
           <a:p>
             <a:r>
-              <a:t>Regresamos a las tres métricas que fijó el protocolo. M1: la brecha salarial por nivel de instrucción con intervalo de confianza y prueba de hipótesis; la tabla de resultados tiene la brecha por hora y por mes en los cuatro niveles, con intervalos de Rao-Wu y valores p ajustados con Holm. M2: la correlación de Spearman de las 32 entidades con intervalo por bootstrap y un ranking defendible; reportamos el intervalo del lugar de cada entidad y declaramos que el ranking solo distingue los extremos. M3: un tablero con al menos cuatro visualizaciones interpretables, alimentado por un pipeline que carga a una base NoSQL; el tablero tiene seis visualizaciones y la ficha de cada entidad. La salvedad honesta de M3: la carga a un servidor MongoDB real no se ejecutó; los documentos y la agregación equivalente sí están verificados.</a:t>
+              <a:t>Regresamos a las tres métricas que fijó el protocolo. M1: la brecha salarial por nivel de instrucción con intervalo de confianza y prueba de hipótesis; la tabla de resultados tiene la brecha por hora y por mes en los cuatro niveles, con intervalos de Rao-Wu y valores p ajustados con Holm. M2: la correlación de Spearman de las 32 entidades con intervalo por bootstrap y un ranking defendible; reportamos el intervalo del lugar de cada entidad y declaramos que el ranking solo distingue los extremos. M3: un tablero con al menos cuatro visualizaciones interpretables, alimentado por un pipeline que carga a una base NoSQL; el tablero tiene seis visualizaciones y la ficha de cada entidad. La salvedad honesta de M3: la carga a un servidor MongoDB real no se ejecutó; la carga completa se probó con un simulador (mongomock) y la agregación equivalente está verificada.</a:t>
             </a:r>
           </a:p>
         </p:txBody>
@@ -4175,7 +4175,7 @@
           </a:p>
           <a:p>
             <a:r>
-              <a:t>Es importante ser honestos con los límites. Son asociaciones y no causalidad: el rendimiento de estudiar mezcla el efecto de la escolaridad con habilidad no observada. Solo vemos el ingreso de quien trabaja y lo declara, así que hay selección; la mitigamos con ponderación por no respuesta e imputación por rangos, pero no la eliminamos. El ingreso por hora se calcula con las horas de una sola semana. Es un solo trimestre. Y por estado tenemos entre mil novecientas y cinco mil novecientas observaciones, por eso reportamos intervalos. Dos aclaraciones técnicas: no cargamos los documentos a un servidor MongoDB real porque no hay uno instalado, y el significado literal de los códigos de rangos de salarios mínimos lo inferimos de su correspondencia exacta con otra variable. Con más tiempo: varios trimestres con el panel rotativo, corrección por selección de Heckman, un mapa geográfico real y estimaciones para áreas pequeñas.</a:t>
+              <a:t>Es importante ser honestos con los límites. Son asociaciones y no causalidad: el rendimiento de estudiar mezcla el efecto de la escolaridad con habilidad no observada. Solo vemos el ingreso de quien trabaja y lo declara, así que hay selección; la mitigamos con ponderación por no respuesta e imputación por rangos, pero no la eliminamos. El ingreso por hora se calcula con las horas de una sola semana. Es un solo trimestre. Y por estado tenemos entre mil novecientas y cinco mil novecientas observaciones, por eso reportamos intervalos. Dos aclaraciones técnicas: no cargamos los documentos a un servidor MongoDB real porque no hay uno instalado (se probó con un simulador, mongomock), y el significado literal de los códigos de rangos de salarios mínimos lo inferimos de su correspondencia exacta con otra variable. Con más tiempo: varios trimestres con el panel rotativo, corrección por selección de Heckman, un mapa geográfico real y estimaciones para áreas pequeñas.</a:t>
             </a:r>
           </a:p>
         </p:txBody>
@@ -18199,7 +18199,7 @@
                   <a:schemeClr val="tx2"/>
                 </a:solidFill>
               </a:rPr>
-              <a:t>Reproducibilidad: una orden, una semilla, 34 pruebas</a:t>
+              <a:t>Reproducibilidad: una orden, una semilla, 41 pruebas</a:t>
             </a:r>
           </a:p>
         </p:txBody>
@@ -19222,7 +19222,7 @@
                   <a:schemeClr val="tx2"/>
                 </a:solidFill>
               </a:rPr>
-              <a:t>34</a:t>
+              <a:t>41</a:t>
             </a:r>
           </a:p>
           <a:p>
@@ -19232,7 +19232,7 @@
                   <a:schemeClr val="tx1"/>
                 </a:solidFill>
               </a:rPr>
-              <a:t>pruebas automáticas (limpieza, encuestas, modelos, integración)</a:t>
+              <a:t>pruebas automáticas (limpieza, encuestas, modelos, capa documental, integración)</a:t>
             </a:r>
           </a:p>
         </p:txBody>
@@ -20538,7 +20538,7 @@
                   <a:srgbClr val="5F6368"/>
                 </a:solidFill>
               </a:rPr>
-              <a:t>Paquete src/enoe/ (16 módulos) + scripts/ (ejecutables) + tests/ (34 pruebas).</a:t>
+              <a:t>Paquete src/enoe/ (16 módulos) + scripts/ (ejecutables) + tests/ (41 pruebas).</a:t>
             </a:r>
           </a:p>
         </p:txBody>
@@ -36451,7 +36451,7 @@
                   <a:schemeClr val="tx1"/>
                 </a:solidFill>
               </a:rPr>
-              <a:t>la carga a un servidor MongoDB real no se ejecutó (no hay servidor instalado); los documentos están listos para mongoimport y la agregación equivalente está verificada.</a:t>
+              <a:t>la carga a un servidor MongoDB real no se ejecutó (no hay servidor instalado); se probó con mongomock (simulador), los documentos están listos para mongoimport y la agregación equivalente está verificada.</a:t>
             </a:r>
           </a:p>
         </p:txBody>
@@ -36780,7 +36780,7 @@
                   <a:schemeClr val="tx1"/>
                 </a:solidFill>
               </a:rPr>
-              <a:t>MongoDB: documentos verificados, carga a servidor real pendiente</a:t>
+              <a:t>MongoDB: probado con mongomock; carga a servidor real pendiente</a:t>
             </a:r>
           </a:p>
         </p:txBody>
@@ -39815,7 +39815,7 @@
                   <a:schemeClr val="tx1"/>
                 </a:solidFill>
               </a:rPr>
-              <a:t>No. Exportamos los documentos y verificamos que la agregación reproduce la vista SQL (0.005 pp); con pymongo y un servidor se cargan.</a:t>
+              <a:t>No hay servidor. La carga completa se probó con mongomock (simulador) y la agregación reproduce la vista SQL (0.005 pp); con un servidor, run_mongo.py --uri la repite.</a:t>
             </a:r>
           </a:p>
         </p:txBody>

--- a/presentacion/Presentacion_Completa_Proyecto_ENOE.pptx
+++ b/presentacion/Presentacion_Completa_Proyecto_ENOE.pptx
@@ -154,7 +154,7 @@
   <p:extLst>
     <p:ext uri="{521415D9-36F7-43E2-AB2F-B90AF26B5E84}">
       <p14:sectionLst xmlns:p14="http://schemas.microsoft.com/office/powerpoint/2010/main">
-        <p14:section name="A · Apertura" id="{FD179230-3A16-4D77-8592-6458B11745EA}">
+        <p14:section name="A · Apertura" id="{AC06BA90-DBA6-47E5-BC4F-EACCA28BB2B4}">
           <p14:sldIdLst>
             <p14:sldId id="256"/>
             <p14:sldId id="257"/>
@@ -163,14 +163,14 @@
             <p14:sldId id="260"/>
           </p14:sldIdLst>
         </p14:section>
-        <p14:section name="B · Datos y diseño muestral" id="{5945FE6A-60F1-4EAE-B5AF-AED6DA407727}">
+        <p14:section name="B · Datos y diseño muestral" id="{0A46ACD3-D296-41B2-AF46-127674624834}">
           <p14:sldIdLst>
             <p14:sldId id="261"/>
             <p14:sldId id="262"/>
             <p14:sldId id="263"/>
           </p14:sldIdLst>
         </p14:section>
-        <p14:section name="C · Limpieza de datos" id="{8994B2B0-B47D-4182-84E2-A16A451F386D}">
+        <p14:section name="C · Limpieza de datos" id="{6914EDBC-B55D-4E57-A86B-1C28AC6C6445}">
           <p14:sldIdLst>
             <p14:sldId id="264"/>
             <p14:sldId id="265"/>
@@ -182,7 +182,7 @@
             <p14:sldId id="271"/>
           </p14:sldIdLst>
         </p14:section>
-        <p14:section name="D · Ingeniería de datos" id="{654306DC-7A39-405F-9898-4B93735CFEA7}">
+        <p14:section name="D · Ingeniería de datos" id="{621D438A-72F3-46A7-A456-B2291D709527}">
           <p14:sldIdLst>
             <p14:sldId id="272"/>
             <p14:sldId id="273"/>
@@ -191,7 +191,7 @@
             <p14:sldId id="276"/>
           </p14:sldIdLst>
         </p14:section>
-        <p14:section name="E · Estadística explicada" id="{9384CD35-8C2F-40CB-99EC-2EF6FF3A4804}">
+        <p14:section name="E · Estadística explicada" id="{9DDE141C-9318-49C0-8970-01CD531570CE}">
           <p14:sldIdLst>
             <p14:sldId id="277"/>
             <p14:sldId id="278"/>
@@ -201,14 +201,14 @@
             <p14:sldId id="282"/>
           </p14:sldIdLst>
         </p14:section>
-        <p14:section name="F1 · Escolaridad e ingreso" id="{7D88B385-EFAE-4301-A916-813CB2B97C85}">
+        <p14:section name="F1 · Escolaridad e ingreso" id="{F624C41D-856E-470D-97D4-38C0E6151BDA}">
           <p14:sldIdLst>
             <p14:sldId id="283"/>
             <p14:sldId id="284"/>
             <p14:sldId id="285"/>
           </p14:sldIdLst>
         </p14:section>
-        <p14:section name="F2 · Brecha de género" id="{4349A61E-68FD-4B3D-8BF9-819DD6C066C9}">
+        <p14:section name="F2 · Brecha de género" id="{FB4C8A91-5F22-4C7D-94E8-6558B63E2897}">
           <p14:sldIdLst>
             <p14:sldId id="286"/>
             <p14:sldId id="287"/>
@@ -219,7 +219,7 @@
             <p14:sldId id="292"/>
           </p14:sldIdLst>
         </p14:section>
-        <p14:section name="F3 · Informalidad, tablero y diagnóstico" id="{310E7B17-2650-4308-A8CA-2117CFBD5D9C}">
+        <p14:section name="F3 · Informalidad, tablero y diagnóstico" id="{49A87BFD-C71F-4ACA-85D4-D686A0001CC7}">
           <p14:sldIdLst>
             <p14:sldId id="293"/>
             <p14:sldId id="294"/>
@@ -227,7 +227,7 @@
             <p14:sldId id="296"/>
           </p14:sldIdLst>
         </p14:section>
-        <p14:section name="G · Cierre" id="{E36C0AE9-1F70-4294-BCB9-9B30844AA12F}">
+        <p14:section name="G · Cierre" id="{33EE8796-2409-4144-9D6E-DDE3F236903C}">
           <p14:sldIdLst>
             <p14:sldId id="297"/>
             <p14:sldId id="298"/>
@@ -235,7 +235,7 @@
             <p14:sldId id="300"/>
           </p14:sldIdLst>
         </p14:section>
-        <p14:section name="H · Respaldo" id="{DB1C60EC-10CE-4ABD-9E80-847AFF89B441}">
+        <p14:section name="H · Respaldo" id="{C899C48C-5DF3-46F6-BF21-A137DF890C97}">
           <p14:sldIdLst>
             <p14:sldId id="301"/>
             <p14:sldId id="302"/>
@@ -7990,7 +7990,7 @@
                   <a:schemeClr val="bg1"/>
                 </a:solidFill>
               </a:rPr>
-              <a:t>Juan Evelio Culin Grajeda · Angel Yireh Garcia Jara · Luis Andre Gutierrez Zuñia</a:t>
+              <a:t>Juan Evelio Culin Grajeda · Angel Yireh Garcia Jara · Luis Andre Gutierrez Zuñiga</a:t>
             </a:r>
           </a:p>
           <a:p>
